--- a/slides/enkf_optimisation.pptx
+++ b/slides/enkf_optimisation.pptx
@@ -860,7 +860,7 @@
           <a:p>
             <a:r>
               <a:rPr lang="en-US" dirty="0"/>
-              <a:t>Two things changed: the forecast model, now our retrained one seeing five frames, and the process noise. The Kalman update and the bias correction are the original ones, so the comparison on the next slide isolates these changes.</a:t>
+              <a:t>What changed: the forecast model, now our retrained one seeing five frames; the process noise; and cross-channel weights in the Kalman update. Localisation radius, inflation and the bias correction are the original ones. Both filters are run through the same GPU code, which also corrects the original localisation so velocity observations are assimilated; that correction applies to both, so the comparison on the next slide isolates these changes.</a:t>
             </a:r>
             <a:endParaRPr lang="en-US" dirty="0"/>
           </a:p>
@@ -1036,7 +1036,7 @@
           <a:p>
             <a:r>
               <a:rPr lang="en-US" dirty="0"/>
-              <a:t>Every second the filter forecasts each member with the retrained model, adds a real error map as noise, pulls the members towards the robots' observations, updates the slow bias estimate, and outputs the mean as the reconstruction and the spread as the uncertainty. Only the forecast model and the noise were changed; the update and the bias correction are the original ones. We checked the bias correction: switching it off makes RMSE 25% worse.</a:t>
+              <a:t>Every second the filter forecasts each member with the retrained model, adds a real error map as noise, pulls the members towards the robots' observations, updates the slow bias estimate, and outputs the mean as the reconstruction and the spread as the uncertainty. The forecast model, the noise and the cross-channel weights were changed; the localisation radius, inflation and the bias correction are the original ones. We checked the bias correction: switching it off makes RMSE 25% worse.</a:t>
             </a:r>
             <a:endParaRPr lang="en-US" dirty="0"/>
           </a:p>
@@ -7140,13 +7140,13 @@
                       <a:r>
                         <a:rPr lang="en-US" sz="1250" dirty="0">
                           <a:solidFill>
-                            <a:srgbClr val="1D2B36"/>
+                            <a:srgbClr val="1B7F72"/>
                           </a:solidFill>
                           <a:latin typeface="Calibri" pitchFamily="34" charset="0"/>
                           <a:ea typeface="Calibri" pitchFamily="34" charset="-122"/>
                           <a:cs typeface="Calibri" pitchFamily="34" charset="-120"/>
                         </a:rPr>
-                        <a:t>same, + cross-channel weights</a:t>
+                        <a:t>same + cross-channel weights</a:t>
                       </a:r>
                       <a:endParaRPr lang="en-US" sz="1250" dirty="0">
                         <a:latin typeface="Calibri" charset="0"/>
@@ -9803,6 +9803,72 @@
         </p:nvSpPr>
         <p:spPr>
           <a:xfrm>
+            <a:off x="3931920" y="3081528"/>
+            <a:ext cx="1298448" cy="256032"/>
+          </a:xfrm>
+          <a:prstGeom prst="roundRect">
+            <a:avLst>
+              <a:gd name="adj" fmla="val 35714"/>
+            </a:avLst>
+          </a:prstGeom>
+          <a:solidFill>
+            <a:srgbClr val="1B7F72"/>
+          </a:solidFill>
+          <a:ln w="12700">
+            <a:solidFill>
+              <a:srgbClr val="1B7F72"/>
+            </a:solidFill>
+            <a:prstDash val="solid"/>
+          </a:ln>
+        </p:spPr>
+      </p:sp>
+      <p:sp>
+        <p:nvSpPr>
+          <p:cNvPr id="27" name="Text 25"/>
+          <p:cNvSpPr txBox="1"/>
+          <p:nvPr/>
+        </p:nvSpPr>
+        <p:spPr>
+          <a:xfrm>
+            <a:off x="3931920" y="3081528"/>
+            <a:ext cx="1298448" cy="256032"/>
+          </a:xfrm>
+          <a:prstGeom prst="rect">
+            <a:avLst/>
+          </a:prstGeom>
+          <a:noFill/>
+          <a:ln/>
+        </p:spPr>
+        <p:txBody>
+          <a:bodyPr wrap="square" lIns="0" tIns="0" rIns="0" bIns="0" rtlCol="0" anchor="ctr"/>
+          <a:lstStyle/>
+          <a:p>
+            <a:pPr algn="ctr" indent="0" marL="0">
+              <a:buNone/>
+            </a:pPr>
+            <a:r>
+              <a:rPr lang="en-US" sz="900" b="1" dirty="0">
+                <a:solidFill>
+                  <a:srgbClr val="FFFFFF"/>
+                </a:solidFill>
+                <a:latin typeface="Calibri" pitchFamily="34" charset="0"/>
+                <a:ea typeface="Calibri" pitchFamily="34" charset="-122"/>
+                <a:cs typeface="Calibri" pitchFamily="34" charset="-120"/>
+              </a:rPr>
+              <a:t>cross-channel weights</a:t>
+            </a:r>
+            <a:endParaRPr lang="en-US" sz="900" dirty="0"/>
+          </a:p>
+        </p:txBody>
+      </p:sp>
+      <p:sp>
+        <p:nvSpPr>
+          <p:cNvPr id="28" name="Shape 26"/>
+          <p:cNvSpPr/>
+          <p:nvPr/>
+        </p:nvSpPr>
+        <p:spPr>
+          <a:xfrm>
             <a:off x="3931920" y="3410712"/>
             <a:ext cx="1298448" cy="256032"/>
           </a:xfrm>
@@ -9824,7 +9890,7 @@
       </p:sp>
       <p:sp>
         <p:nvSpPr>
-          <p:cNvPr id="27" name="Text 25"/>
+          <p:cNvPr id="29" name="Text 27"/>
           <p:cNvSpPr txBox="1"/>
           <p:nvPr/>
         </p:nvSpPr>
@@ -9855,7 +9921,7 @@
                 <a:ea typeface="Calibri" pitchFamily="34" charset="-122"/>
                 <a:cs typeface="Calibri" pitchFamily="34" charset="-120"/>
               </a:rPr>
-              <a:t>original</a:t>
+              <a:t>radius, inflation</a:t>
             </a:r>
             <a:endParaRPr lang="en-US" sz="900" dirty="0"/>
           </a:p>
@@ -9863,7 +9929,7 @@
       </p:sp>
       <p:sp>
         <p:nvSpPr>
-          <p:cNvPr id="28" name="Text 26"/>
+          <p:cNvPr id="30" name="Text 28"/>
           <p:cNvSpPr txBox="1"/>
           <p:nvPr/>
         </p:nvSpPr>
@@ -9902,7 +9968,7 @@
       </p:sp>
       <p:sp>
         <p:nvSpPr>
-          <p:cNvPr id="29" name="Shape 27"/>
+          <p:cNvPr id="31" name="Shape 29"/>
           <p:cNvSpPr/>
           <p:nvPr/>
         </p:nvSpPr>
@@ -9929,7 +9995,7 @@
       </p:sp>
       <p:sp>
         <p:nvSpPr>
-          <p:cNvPr id="30" name="Shape 28"/>
+          <p:cNvPr id="32" name="Shape 30"/>
           <p:cNvSpPr/>
           <p:nvPr/>
         </p:nvSpPr>
@@ -9954,7 +10020,7 @@
       </p:sp>
       <p:sp>
         <p:nvSpPr>
-          <p:cNvPr id="31" name="Text 29"/>
+          <p:cNvPr id="33" name="Text 31"/>
           <p:cNvSpPr txBox="1"/>
           <p:nvPr/>
         </p:nvSpPr>
@@ -9993,7 +10059,7 @@
       </p:sp>
       <p:sp>
         <p:nvSpPr>
-          <p:cNvPr id="32" name="Text 30"/>
+          <p:cNvPr id="34" name="Text 32"/>
           <p:cNvSpPr txBox="1"/>
           <p:nvPr/>
         </p:nvSpPr>
@@ -10032,7 +10098,7 @@
       </p:sp>
       <p:sp>
         <p:nvSpPr>
-          <p:cNvPr id="33" name="Text 31"/>
+          <p:cNvPr id="35" name="Text 33"/>
           <p:cNvSpPr txBox="1"/>
           <p:nvPr/>
         </p:nvSpPr>
@@ -10071,7 +10137,7 @@
       </p:sp>
       <p:sp>
         <p:nvSpPr>
-          <p:cNvPr id="34" name="Shape 32"/>
+          <p:cNvPr id="36" name="Shape 34"/>
           <p:cNvSpPr/>
           <p:nvPr/>
         </p:nvSpPr>
@@ -10098,7 +10164,7 @@
       </p:sp>
       <p:sp>
         <p:nvSpPr>
-          <p:cNvPr id="35" name="Text 33"/>
+          <p:cNvPr id="37" name="Text 35"/>
           <p:cNvSpPr txBox="1"/>
           <p:nvPr/>
         </p:nvSpPr>
@@ -10137,7 +10203,7 @@
       </p:sp>
       <p:sp>
         <p:nvSpPr>
-          <p:cNvPr id="36" name="Text 34"/>
+          <p:cNvPr id="38" name="Text 36"/>
           <p:cNvSpPr txBox="1"/>
           <p:nvPr/>
         </p:nvSpPr>
@@ -10176,7 +10242,7 @@
       </p:sp>
       <p:sp>
         <p:nvSpPr>
-          <p:cNvPr id="37" name="Shape 35"/>
+          <p:cNvPr id="39" name="Shape 37"/>
           <p:cNvSpPr/>
           <p:nvPr/>
         </p:nvSpPr>
@@ -10203,7 +10269,7 @@
       </p:sp>
       <p:sp>
         <p:nvSpPr>
-          <p:cNvPr id="38" name="Shape 36"/>
+          <p:cNvPr id="40" name="Shape 38"/>
           <p:cNvSpPr/>
           <p:nvPr/>
         </p:nvSpPr>
@@ -10228,7 +10294,7 @@
       </p:sp>
       <p:sp>
         <p:nvSpPr>
-          <p:cNvPr id="39" name="Text 37"/>
+          <p:cNvPr id="41" name="Text 39"/>
           <p:cNvSpPr txBox="1"/>
           <p:nvPr/>
         </p:nvSpPr>
@@ -10267,7 +10333,7 @@
       </p:sp>
       <p:sp>
         <p:nvSpPr>
-          <p:cNvPr id="40" name="Text 38"/>
+          <p:cNvPr id="42" name="Text 40"/>
           <p:cNvSpPr txBox="1"/>
           <p:nvPr/>
         </p:nvSpPr>
@@ -10306,7 +10372,7 @@
       </p:sp>
       <p:sp>
         <p:nvSpPr>
-          <p:cNvPr id="41" name="Text 39"/>
+          <p:cNvPr id="43" name="Text 41"/>
           <p:cNvSpPr txBox="1"/>
           <p:nvPr/>
         </p:nvSpPr>
@@ -10345,7 +10411,7 @@
       </p:sp>
       <p:sp>
         <p:nvSpPr>
-          <p:cNvPr id="42" name="Text 40"/>
+          <p:cNvPr id="44" name="Text 42"/>
           <p:cNvSpPr txBox="1"/>
           <p:nvPr/>
         </p:nvSpPr>
@@ -10384,7 +10450,7 @@
       </p:sp>
       <p:sp>
         <p:nvSpPr>
-          <p:cNvPr id="43" name="Text 41"/>
+          <p:cNvPr id="45" name="Text 43"/>
           <p:cNvSpPr txBox="1"/>
           <p:nvPr/>
         </p:nvSpPr>
@@ -10412,7 +10478,7 @@
       </p:sp>
       <p:sp>
         <p:nvSpPr>
-          <p:cNvPr id="44" name="Text 42"/>
+          <p:cNvPr id="46" name="Text 44"/>
           <p:cNvSpPr txBox="1"/>
           <p:nvPr/>
         </p:nvSpPr>

--- a/slides/enkf_optimisation.pptx
+++ b/slides/enkf_optimisation.pptx
@@ -948,7 +948,7 @@
           <a:p>
             <a:r>
               <a:rPr lang="en-US" dirty="0"/>
-              <a:t>Both filters run through the same code on the same observations and are scored exactly as in the six-method comparison. The uncertainty goes from unusable to usable: spread from 1% of the error to about 1.0 times it, and CRPS skill from negative, worse than a constant sigma, to positive. Pooled RMSE is slightly lower than the original; velocity variance is still somewhat worse.</a:t>
+              <a:t>Both filters run through the same code on the same observations and are scored exactly as in the six-method comparison. The uncertainty goes from unusable to usable: spread from about 1% of the error to 1.4 times it, now somewhat too wide, mostly on the velocity channels; CRPS about 29% lower. Pooled RMSE is slightly lower than the original; velocity variance is still somewhat worse.</a:t>
             </a:r>
             <a:endParaRPr lang="en-US" dirty="0"/>
           </a:p>
@@ -1606,7 +1606,7 @@
                 <a:ea typeface="Cambria" pitchFamily="34" charset="-122"/>
                 <a:cs typeface="Cambria" pitchFamily="34" charset="-120"/>
               </a:rPr>
-              <a:t>0.0025</a:t>
+              <a:t>0.0036</a:t>
             </a:r>
             <a:endParaRPr lang="en-US" sz="3600" dirty="0"/>
           </a:p>
@@ -1684,7 +1684,7 @@
                 <a:ea typeface="Cambria" pitchFamily="34" charset="-122"/>
                 <a:cs typeface="Cambria" pitchFamily="34" charset="-120"/>
               </a:rPr>
-              <a:t>0.24</a:t>
+              <a:t>0.26</a:t>
             </a:r>
             <a:endParaRPr lang="en-US" sz="3600" dirty="0"/>
           </a:p>
@@ -1821,7 +1821,7 @@
                 <a:ea typeface="Calibri" pitchFamily="34" charset="-122"/>
                 <a:cs typeface="Calibri" pitchFamily="34" charset="-120"/>
               </a:rPr>
-              <a:t>Original configuration, test days.</a:t>
+              <a:t>Original configuration; seven test days, unobserved walkable cells; spread = RMS ensemble spread.</a:t>
             </a:r>
             <a:endParaRPr lang="en-US" sz="850" dirty="0"/>
           </a:p>
@@ -8306,7 +8306,7 @@
                           <a:ea typeface="Calibri" pitchFamily="34" charset="-122"/>
                           <a:cs typeface="Calibri" pitchFamily="34" charset="-120"/>
                         </a:rPr>
-                        <a:t>0.010</a:t>
+                        <a:t>0.014</a:t>
                       </a:r>
                       <a:endParaRPr lang="en-US" sz="1150" dirty="0">
                         <a:latin typeface="Calibri" charset="0"/>
@@ -8374,7 +8374,7 @@
                           <a:ea typeface="Calibri" pitchFamily="34" charset="-122"/>
                           <a:cs typeface="Calibri" pitchFamily="34" charset="-120"/>
                         </a:rPr>
-                        <a:t>1.008</a:t>
+                        <a:t>1.381</a:t>
                       </a:r>
                       <a:endParaRPr lang="en-US" sz="1150" dirty="0">
                         <a:latin typeface="Calibri" charset="0"/>
@@ -8512,7 +8512,7 @@
                           <a:ea typeface="Calibri" pitchFamily="34" charset="-122"/>
                           <a:cs typeface="Calibri" pitchFamily="34" charset="-120"/>
                         </a:rPr>
-                        <a:t>CRPS skill (higher is better)</a:t>
+                        <a:t>CRPS (lower is better)</a:t>
                       </a:r>
                       <a:endParaRPr lang="en-US" sz="1150" dirty="0">
                         <a:latin typeface="Calibri" charset="0"/>
@@ -8580,7 +8580,7 @@
                           <a:ea typeface="Calibri" pitchFamily="34" charset="-122"/>
                           <a:cs typeface="Calibri" pitchFamily="34" charset="-120"/>
                         </a:rPr>
-                        <a:t>-0.252</a:t>
+                        <a:t>0.161</a:t>
                       </a:r>
                       <a:endParaRPr lang="en-US" sz="1150" dirty="0">
                         <a:latin typeface="Calibri" charset="0"/>
@@ -8648,7 +8648,7 @@
                           <a:ea typeface="Calibri" pitchFamily="34" charset="-122"/>
                           <a:cs typeface="Calibri" pitchFamily="34" charset="-120"/>
                         </a:rPr>
-                        <a:t>0.113</a:t>
+                        <a:t>0.115</a:t>
                       </a:r>
                       <a:endParaRPr lang="en-US" sz="1150" dirty="0">
                         <a:latin typeface="Calibri" charset="0"/>
@@ -8716,7 +8716,7 @@
                           <a:ea typeface="Calibri" pitchFamily="34" charset="-122"/>
                           <a:cs typeface="Calibri" pitchFamily="34" charset="-120"/>
                         </a:rPr>
-                        <a:t>&gt; 0</a:t>
+                        <a:t>—</a:t>
                       </a:r>
                       <a:endParaRPr lang="en-US" sz="1150" dirty="0">
                         <a:latin typeface="Calibri" charset="0"/>
@@ -8826,7 +8826,7 @@
                 <a:ea typeface="Calibri" pitchFamily="34" charset="-122"/>
                 <a:cs typeface="Calibri" pitchFamily="34" charset="-120"/>
               </a:rPr>
-              <a:t>Spread from 1% of the error to 1.01×.</a:t>
+              <a:t>Spread from 1% of the error to 1.38× (now somewhat too wide); CRPS 29% lower.</a:t>
             </a:r>
             <a:endParaRPr lang="en-US" sz="1300" dirty="0"/>
           </a:p>
@@ -8903,7 +8903,7 @@
                 <a:ea typeface="Calibri" pitchFamily="34" charset="-122"/>
                 <a:cs typeface="Calibri" pitchFamily="34" charset="-120"/>
               </a:rPr>
-              <a:t>Seven test days, unobserved walkable cells, four channels; same code, observations and scoring for both.</a:t>
+              <a:t>Seven test days, unobserved walkable cells, four channels; spread = RMS ensemble spread; same code, observations and scoring for both.</a:t>
             </a:r>
             <a:endParaRPr lang="en-US" sz="850" dirty="0"/>
           </a:p>
